--- a/sections/02_ringer/figures/ATLAS_HAD_Layers_v5.pptx
+++ b/sections/02_ringer/figures/ATLAS_HAD_Layers_v5.pptx
@@ -243,7 +243,7 @@
           <a:p>
             <a:fld id="{16D9E493-FE17-8A48-B781-062281A09A6F}" type="datetimeFigureOut">
               <a:rPr lang="en-BR" smtClean="0"/>
-              <a:t>15/01/21</a:t>
+              <a:t>28/09/24</a:t>
             </a:fld>
             <a:endParaRPr lang="en-BR"/>
           </a:p>
@@ -413,7 +413,7 @@
           <a:p>
             <a:fld id="{16D9E493-FE17-8A48-B781-062281A09A6F}" type="datetimeFigureOut">
               <a:rPr lang="en-BR" smtClean="0"/>
-              <a:t>15/01/21</a:t>
+              <a:t>28/09/24</a:t>
             </a:fld>
             <a:endParaRPr lang="en-BR"/>
           </a:p>
@@ -593,7 +593,7 @@
           <a:p>
             <a:fld id="{16D9E493-FE17-8A48-B781-062281A09A6F}" type="datetimeFigureOut">
               <a:rPr lang="en-BR" smtClean="0"/>
-              <a:t>15/01/21</a:t>
+              <a:t>28/09/24</a:t>
             </a:fld>
             <a:endParaRPr lang="en-BR"/>
           </a:p>
@@ -763,7 +763,7 @@
           <a:p>
             <a:fld id="{16D9E493-FE17-8A48-B781-062281A09A6F}" type="datetimeFigureOut">
               <a:rPr lang="en-BR" smtClean="0"/>
-              <a:t>15/01/21</a:t>
+              <a:t>28/09/24</a:t>
             </a:fld>
             <a:endParaRPr lang="en-BR"/>
           </a:p>
@@ -1009,7 +1009,7 @@
           <a:p>
             <a:fld id="{16D9E493-FE17-8A48-B781-062281A09A6F}" type="datetimeFigureOut">
               <a:rPr lang="en-BR" smtClean="0"/>
-              <a:t>15/01/21</a:t>
+              <a:t>28/09/24</a:t>
             </a:fld>
             <a:endParaRPr lang="en-BR"/>
           </a:p>
@@ -1241,7 +1241,7 @@
           <a:p>
             <a:fld id="{16D9E493-FE17-8A48-B781-062281A09A6F}" type="datetimeFigureOut">
               <a:rPr lang="en-BR" smtClean="0"/>
-              <a:t>15/01/21</a:t>
+              <a:t>28/09/24</a:t>
             </a:fld>
             <a:endParaRPr lang="en-BR"/>
           </a:p>
@@ -1608,7 +1608,7 @@
           <a:p>
             <a:fld id="{16D9E493-FE17-8A48-B781-062281A09A6F}" type="datetimeFigureOut">
               <a:rPr lang="en-BR" smtClean="0"/>
-              <a:t>15/01/21</a:t>
+              <a:t>28/09/24</a:t>
             </a:fld>
             <a:endParaRPr lang="en-BR"/>
           </a:p>
@@ -1726,7 +1726,7 @@
           <a:p>
             <a:fld id="{16D9E493-FE17-8A48-B781-062281A09A6F}" type="datetimeFigureOut">
               <a:rPr lang="en-BR" smtClean="0"/>
-              <a:t>15/01/21</a:t>
+              <a:t>28/09/24</a:t>
             </a:fld>
             <a:endParaRPr lang="en-BR"/>
           </a:p>
@@ -1821,7 +1821,7 @@
           <a:p>
             <a:fld id="{16D9E493-FE17-8A48-B781-062281A09A6F}" type="datetimeFigureOut">
               <a:rPr lang="en-BR" smtClean="0"/>
-              <a:t>15/01/21</a:t>
+              <a:t>28/09/24</a:t>
             </a:fld>
             <a:endParaRPr lang="en-BR"/>
           </a:p>
@@ -2098,7 +2098,7 @@
           <a:p>
             <a:fld id="{16D9E493-FE17-8A48-B781-062281A09A6F}" type="datetimeFigureOut">
               <a:rPr lang="en-BR" smtClean="0"/>
-              <a:t>15/01/21</a:t>
+              <a:t>28/09/24</a:t>
             </a:fld>
             <a:endParaRPr lang="en-BR"/>
           </a:p>
@@ -2355,7 +2355,7 @@
           <a:p>
             <a:fld id="{16D9E493-FE17-8A48-B781-062281A09A6F}" type="datetimeFigureOut">
               <a:rPr lang="en-BR" smtClean="0"/>
-              <a:t>15/01/21</a:t>
+              <a:t>28/09/24</a:t>
             </a:fld>
             <a:endParaRPr lang="en-BR"/>
           </a:p>
@@ -2568,7 +2568,7 @@
           <a:p>
             <a:fld id="{16D9E493-FE17-8A48-B781-062281A09A6F}" type="datetimeFigureOut">
               <a:rPr lang="en-BR" smtClean="0"/>
-              <a:t>15/01/21</a:t>
+              <a:t>28/09/24</a:t>
             </a:fld>
             <a:endParaRPr lang="en-BR"/>
           </a:p>
@@ -2995,7 +2995,7 @@
         </p:blipFill>
         <p:spPr>
           <a:xfrm>
-            <a:off x="3392083" y="-2311754"/>
+            <a:off x="3091998" y="-2185578"/>
             <a:ext cx="8999538" cy="8999538"/>
           </a:xfrm>
           <a:prstGeom prst="rect">
@@ -3025,7 +3025,7 @@
         </p:blipFill>
         <p:spPr>
           <a:xfrm>
-            <a:off x="817733" y="-1380311"/>
+            <a:off x="785407" y="-1359643"/>
             <a:ext cx="8999538" cy="8999538"/>
           </a:xfrm>
           <a:prstGeom prst="rect">
@@ -3055,7 +3055,7 @@
         </p:blipFill>
         <p:spPr>
           <a:xfrm>
-            <a:off x="-1675714" y="-289560"/>
+            <a:off x="-1597930" y="-393925"/>
             <a:ext cx="8999538" cy="8999538"/>
           </a:xfrm>
           <a:prstGeom prst="rect">
@@ -3077,8 +3077,8 @@
         </p:nvSpPr>
         <p:spPr>
           <a:xfrm>
-            <a:off x="9288571" y="4032121"/>
-            <a:ext cx="1119217" cy="461665"/>
+            <a:off x="8927663" y="4136821"/>
+            <a:ext cx="899605" cy="461665"/>
           </a:xfrm>
           <a:prstGeom prst="rect">
             <a:avLst/>
@@ -3097,7 +3097,7 @@
                 <a:ea typeface="CMU Serif Roman" panose="02000603000000000000" pitchFamily="2" charset="0"/>
                 <a:cs typeface="CMU Serif Roman" panose="02000603000000000000" pitchFamily="2" charset="0"/>
               </a:rPr>
-              <a:t>HAD.3</a:t>
+              <a:t>HAD3</a:t>
             </a:r>
           </a:p>
         </p:txBody>
@@ -3116,8 +3116,8 @@
         </p:nvSpPr>
         <p:spPr>
           <a:xfrm>
-            <a:off x="7059474" y="5023584"/>
-            <a:ext cx="1119217" cy="461665"/>
+            <a:off x="6721279" y="5030229"/>
+            <a:ext cx="899605" cy="461665"/>
           </a:xfrm>
           <a:prstGeom prst="rect">
             <a:avLst/>
@@ -3136,7 +3136,7 @@
                 <a:ea typeface="CMU Serif Roman" panose="02000603000000000000" pitchFamily="2" charset="0"/>
                 <a:cs typeface="CMU Serif Roman" panose="02000603000000000000" pitchFamily="2" charset="0"/>
               </a:rPr>
-              <a:t>HAD.2</a:t>
+              <a:t>HAD2</a:t>
             </a:r>
           </a:p>
         </p:txBody>
@@ -3155,8 +3155,8 @@
         </p:nvSpPr>
         <p:spPr>
           <a:xfrm>
-            <a:off x="4706422" y="5895400"/>
-            <a:ext cx="1119217" cy="461665"/>
+            <a:off x="4385571" y="5954570"/>
+            <a:ext cx="899605" cy="461665"/>
           </a:xfrm>
           <a:prstGeom prst="rect">
             <a:avLst/>
@@ -3175,11 +3175,711 @@
                 <a:ea typeface="CMU Serif Roman" panose="02000603000000000000" pitchFamily="2" charset="0"/>
                 <a:cs typeface="CMU Serif Roman" panose="02000603000000000000" pitchFamily="2" charset="0"/>
               </a:rPr>
-              <a:t>HAD.1</a:t>
-            </a:r>
-          </a:p>
-        </p:txBody>
-      </p:sp>
+              <a:t>HAD1</a:t>
+            </a:r>
+          </a:p>
+        </p:txBody>
+      </p:sp>
+      <p:sp>
+        <p:nvSpPr>
+          <p:cNvPr id="3" name="Left Brace 2">
+            <a:extLst>
+              <a:ext uri="{FF2B5EF4-FFF2-40B4-BE49-F238E27FC236}">
+                <a16:creationId xmlns:a16="http://schemas.microsoft.com/office/drawing/2014/main" id="{66391B8B-AFB4-D5BF-1978-F7F51413316F}"/>
+              </a:ext>
+            </a:extLst>
+          </p:cNvPr>
+          <p:cNvSpPr/>
+          <p:nvPr/>
+        </p:nvSpPr>
+        <p:spPr>
+          <a:xfrm rot="6426872">
+            <a:off x="8541964" y="-29281"/>
+            <a:ext cx="178789" cy="1479780"/>
+          </a:xfrm>
+          <a:prstGeom prst="leftBrace">
+            <a:avLst/>
+          </a:prstGeom>
+          <a:ln w="25400">
+            <a:solidFill>
+              <a:schemeClr val="tx1"/>
+            </a:solidFill>
+          </a:ln>
+          <a:scene3d>
+            <a:camera prst="orthographicFront">
+              <a:rot lat="0" lon="0" rev="0"/>
+            </a:camera>
+            <a:lightRig rig="threePt" dir="t"/>
+          </a:scene3d>
+        </p:spPr>
+        <p:style>
+          <a:lnRef idx="1">
+            <a:schemeClr val="accent1"/>
+          </a:lnRef>
+          <a:fillRef idx="0">
+            <a:schemeClr val="accent1"/>
+          </a:fillRef>
+          <a:effectRef idx="0">
+            <a:schemeClr val="accent1"/>
+          </a:effectRef>
+          <a:fontRef idx="minor">
+            <a:schemeClr val="tx1"/>
+          </a:fontRef>
+        </p:style>
+        <p:txBody>
+          <a:bodyPr rtlCol="0" anchor="ctr"/>
+          <a:lstStyle/>
+          <a:p>
+            <a:pPr algn="ctr"/>
+            <a:endParaRPr lang="en-BR" dirty="0"/>
+          </a:p>
+        </p:txBody>
+      </p:sp>
+      <p:sp>
+        <p:nvSpPr>
+          <p:cNvPr id="7" name="Left Brace 6">
+            <a:extLst>
+              <a:ext uri="{FF2B5EF4-FFF2-40B4-BE49-F238E27FC236}">
+                <a16:creationId xmlns:a16="http://schemas.microsoft.com/office/drawing/2014/main" id="{AE3B1F54-0757-4D19-3FB1-D6C1A0CC0B9E}"/>
+              </a:ext>
+            </a:extLst>
+          </p:cNvPr>
+          <p:cNvSpPr/>
+          <p:nvPr/>
+        </p:nvSpPr>
+        <p:spPr>
+          <a:xfrm rot="10800000">
+            <a:off x="9337142" y="1043000"/>
+            <a:ext cx="134387" cy="671172"/>
+          </a:xfrm>
+          <a:prstGeom prst="leftBrace">
+            <a:avLst/>
+          </a:prstGeom>
+          <a:ln w="25400">
+            <a:solidFill>
+              <a:schemeClr val="tx1"/>
+            </a:solidFill>
+          </a:ln>
+        </p:spPr>
+        <p:style>
+          <a:lnRef idx="1">
+            <a:schemeClr val="accent1"/>
+          </a:lnRef>
+          <a:fillRef idx="0">
+            <a:schemeClr val="accent1"/>
+          </a:fillRef>
+          <a:effectRef idx="0">
+            <a:schemeClr val="accent1"/>
+          </a:effectRef>
+          <a:fontRef idx="minor">
+            <a:schemeClr val="tx1"/>
+          </a:fontRef>
+        </p:style>
+        <p:txBody>
+          <a:bodyPr rtlCol="0" anchor="ctr"/>
+          <a:lstStyle/>
+          <a:p>
+            <a:pPr algn="ctr"/>
+            <a:endParaRPr lang="en-BR" dirty="0"/>
+          </a:p>
+        </p:txBody>
+      </p:sp>
+      <mc:AlternateContent xmlns:mc="http://schemas.openxmlformats.org/markup-compatibility/2006" xmlns:a14="http://schemas.microsoft.com/office/drawing/2010/main">
+        <mc:Choice Requires="a14">
+          <p:sp>
+            <p:nvSpPr>
+              <p:cNvPr id="9" name="TextBox 8">
+                <a:extLst>
+                  <a:ext uri="{FF2B5EF4-FFF2-40B4-BE49-F238E27FC236}">
+                    <a16:creationId xmlns:a16="http://schemas.microsoft.com/office/drawing/2014/main" id="{1188E64F-5724-7E32-4F5E-6122FC0F9053}"/>
+                  </a:ext>
+                </a:extLst>
+              </p:cNvPr>
+              <p:cNvSpPr txBox="1"/>
+              <p:nvPr/>
+            </p:nvSpPr>
+            <p:spPr>
+              <a:xfrm>
+                <a:off x="8455084" y="127316"/>
+                <a:ext cx="616836" cy="469231"/>
+              </a:xfrm>
+              <a:prstGeom prst="rect">
+                <a:avLst/>
+              </a:prstGeom>
+              <a:noFill/>
+            </p:spPr>
+            <p:txBody>
+              <a:bodyPr wrap="none" lIns="0" tIns="0" rIns="0" bIns="0" rtlCol="0">
+                <a:spAutoFit/>
+              </a:bodyPr>
+              <a:lstStyle/>
+              <a:p>
+                <a:pPr/>
+                <a14:m>
+                  <m:oMathPara xmlns:m="http://schemas.openxmlformats.org/officeDocument/2006/math">
+                    <m:oMathParaPr>
+                      <m:jc m:val="centerGroup"/>
+                    </m:oMathParaPr>
+                    <m:oMath xmlns:m="http://schemas.openxmlformats.org/officeDocument/2006/math">
+                      <m:sSub>
+                        <m:sSubPr>
+                          <m:ctrlPr>
+                            <a:rPr lang="en-US" sz="2800" b="0" i="1" smtClean="0">
+                              <a:latin typeface="Cambria Math" panose="02040503050406030204" pitchFamily="18" charset="0"/>
+                            </a:rPr>
+                          </m:ctrlPr>
+                        </m:sSubPr>
+                        <m:e>
+                          <m:r>
+                            <a:rPr lang="en-US" sz="2800" b="0" i="1" smtClean="0">
+                              <a:latin typeface="Cambria Math" panose="02040503050406030204" pitchFamily="18" charset="0"/>
+                            </a:rPr>
+                            <m:t>h</m:t>
+                          </m:r>
+                        </m:e>
+                        <m:sub>
+                          <m:r>
+                            <a:rPr lang="pt-BR" sz="2800" b="0" i="1" smtClean="0">
+                              <a:latin typeface="Cambria Math" panose="02040503050406030204" pitchFamily="18" charset="0"/>
+                            </a:rPr>
+                            <m:t>𝜂</m:t>
+                          </m:r>
+                          <m:r>
+                            <a:rPr lang="pt-BR" sz="2800" b="0" i="1" smtClean="0">
+                              <a:latin typeface="Cambria Math" panose="02040503050406030204" pitchFamily="18" charset="0"/>
+                            </a:rPr>
+                            <m:t>,</m:t>
+                          </m:r>
+                          <m:r>
+                            <a:rPr lang="pt-BR" sz="2800" b="0" i="1" smtClean="0">
+                              <a:latin typeface="Cambria Math" panose="02040503050406030204" pitchFamily="18" charset="0"/>
+                            </a:rPr>
+                            <m:t>𝑙</m:t>
+                          </m:r>
+                        </m:sub>
+                      </m:sSub>
+                    </m:oMath>
+                  </m:oMathPara>
+                </a14:m>
+                <a:endParaRPr lang="en-BR" sz="2800" dirty="0"/>
+              </a:p>
+            </p:txBody>
+          </p:sp>
+        </mc:Choice>
+        <mc:Fallback xmlns="">
+          <p:sp>
+            <p:nvSpPr>
+              <p:cNvPr id="9" name="TextBox 8">
+                <a:extLst>
+                  <a:ext uri="{FF2B5EF4-FFF2-40B4-BE49-F238E27FC236}">
+                    <a16:creationId xmlns:a16="http://schemas.microsoft.com/office/drawing/2014/main" id="{1188E64F-5724-7E32-4F5E-6122FC0F9053}"/>
+                  </a:ext>
+                </a:extLst>
+              </p:cNvPr>
+              <p:cNvSpPr txBox="1">
+                <a:spLocks noRot="1" noChangeAspect="1" noMove="1" noResize="1" noEditPoints="1" noAdjustHandles="1" noChangeArrowheads="1" noChangeShapeType="1" noTextEdit="1"/>
+              </p:cNvSpPr>
+              <p:nvPr/>
+            </p:nvSpPr>
+            <p:spPr>
+              <a:xfrm>
+                <a:off x="8455084" y="127316"/>
+                <a:ext cx="616836" cy="469231"/>
+              </a:xfrm>
+              <a:prstGeom prst="rect">
+                <a:avLst/>
+              </a:prstGeom>
+              <a:blipFill>
+                <a:blip r:embed="rId5"/>
+                <a:stretch>
+                  <a:fillRect l="-12000" r="-2000" b="-21053"/>
+                </a:stretch>
+              </a:blipFill>
+            </p:spPr>
+            <p:txBody>
+              <a:bodyPr/>
+              <a:lstStyle/>
+              <a:p>
+                <a:r>
+                  <a:rPr lang="en-BR">
+                    <a:noFill/>
+                  </a:rPr>
+                  <a:t> </a:t>
+                </a:r>
+              </a:p>
+            </p:txBody>
+          </p:sp>
+        </mc:Fallback>
+      </mc:AlternateContent>
+      <mc:AlternateContent xmlns:mc="http://schemas.openxmlformats.org/markup-compatibility/2006" xmlns:a14="http://schemas.microsoft.com/office/drawing/2010/main">
+        <mc:Choice Requires="a14">
+          <p:sp>
+            <p:nvSpPr>
+              <p:cNvPr id="10" name="TextBox 9">
+                <a:extLst>
+                  <a:ext uri="{FF2B5EF4-FFF2-40B4-BE49-F238E27FC236}">
+                    <a16:creationId xmlns:a16="http://schemas.microsoft.com/office/drawing/2014/main" id="{2BF035DA-1797-E3E3-70A7-077F0564697A}"/>
+                  </a:ext>
+                </a:extLst>
+              </p:cNvPr>
+              <p:cNvSpPr txBox="1"/>
+              <p:nvPr/>
+            </p:nvSpPr>
+            <p:spPr>
+              <a:xfrm>
+                <a:off x="9533711" y="1171042"/>
+                <a:ext cx="657809" cy="469296"/>
+              </a:xfrm>
+              <a:prstGeom prst="rect">
+                <a:avLst/>
+              </a:prstGeom>
+              <a:noFill/>
+            </p:spPr>
+            <p:txBody>
+              <a:bodyPr wrap="none" lIns="0" tIns="0" rIns="0" bIns="0" rtlCol="0">
+                <a:spAutoFit/>
+              </a:bodyPr>
+              <a:lstStyle/>
+              <a:p>
+                <a:pPr/>
+                <a14:m>
+                  <m:oMathPara xmlns:m="http://schemas.openxmlformats.org/officeDocument/2006/math">
+                    <m:oMathParaPr>
+                      <m:jc m:val="centerGroup"/>
+                    </m:oMathParaPr>
+                    <m:oMath xmlns:m="http://schemas.openxmlformats.org/officeDocument/2006/math">
+                      <m:sSub>
+                        <m:sSubPr>
+                          <m:ctrlPr>
+                            <a:rPr lang="en-US" sz="2800" b="0" i="1" smtClean="0">
+                              <a:latin typeface="Cambria Math" panose="02040503050406030204" pitchFamily="18" charset="0"/>
+                            </a:rPr>
+                          </m:ctrlPr>
+                        </m:sSubPr>
+                        <m:e>
+                          <m:r>
+                            <a:rPr lang="en-US" sz="2800" b="0" i="1" smtClean="0">
+                              <a:latin typeface="Cambria Math" panose="02040503050406030204" pitchFamily="18" charset="0"/>
+                            </a:rPr>
+                            <m:t>h</m:t>
+                          </m:r>
+                        </m:e>
+                        <m:sub>
+                          <m:r>
+                            <a:rPr lang="pt-BR" sz="2800" b="0" i="1" smtClean="0">
+                              <a:latin typeface="Cambria Math" panose="02040503050406030204" pitchFamily="18" charset="0"/>
+                            </a:rPr>
+                            <m:t>𝜙</m:t>
+                          </m:r>
+                          <m:r>
+                            <a:rPr lang="pt-BR" sz="2800" b="0" i="1" smtClean="0">
+                              <a:latin typeface="Cambria Math" panose="02040503050406030204" pitchFamily="18" charset="0"/>
+                            </a:rPr>
+                            <m:t>,</m:t>
+                          </m:r>
+                          <m:r>
+                            <a:rPr lang="pt-BR" sz="2800" b="0" i="1" smtClean="0">
+                              <a:latin typeface="Cambria Math" panose="02040503050406030204" pitchFamily="18" charset="0"/>
+                            </a:rPr>
+                            <m:t>𝑙</m:t>
+                          </m:r>
+                        </m:sub>
+                      </m:sSub>
+                    </m:oMath>
+                  </m:oMathPara>
+                </a14:m>
+                <a:endParaRPr lang="en-BR" sz="2800" dirty="0"/>
+              </a:p>
+            </p:txBody>
+          </p:sp>
+        </mc:Choice>
+        <mc:Fallback xmlns="">
+          <p:sp>
+            <p:nvSpPr>
+              <p:cNvPr id="10" name="TextBox 9">
+                <a:extLst>
+                  <a:ext uri="{FF2B5EF4-FFF2-40B4-BE49-F238E27FC236}">
+                    <a16:creationId xmlns:a16="http://schemas.microsoft.com/office/drawing/2014/main" id="{2BF035DA-1797-E3E3-70A7-077F0564697A}"/>
+                  </a:ext>
+                </a:extLst>
+              </p:cNvPr>
+              <p:cNvSpPr txBox="1">
+                <a:spLocks noRot="1" noChangeAspect="1" noMove="1" noResize="1" noEditPoints="1" noAdjustHandles="1" noChangeArrowheads="1" noChangeShapeType="1" noTextEdit="1"/>
+              </p:cNvSpPr>
+              <p:nvPr/>
+            </p:nvSpPr>
+            <p:spPr>
+              <a:xfrm>
+                <a:off x="9533711" y="1171042"/>
+                <a:ext cx="657809" cy="469296"/>
+              </a:xfrm>
+              <a:prstGeom prst="rect">
+                <a:avLst/>
+              </a:prstGeom>
+              <a:blipFill>
+                <a:blip r:embed="rId6"/>
+                <a:stretch>
+                  <a:fillRect l="-11321" r="-3774" b="-26316"/>
+                </a:stretch>
+              </a:blipFill>
+            </p:spPr>
+            <p:txBody>
+              <a:bodyPr/>
+              <a:lstStyle/>
+              <a:p>
+                <a:r>
+                  <a:rPr lang="en-BR">
+                    <a:noFill/>
+                  </a:rPr>
+                  <a:t> </a:t>
+                </a:r>
+              </a:p>
+            </p:txBody>
+          </p:sp>
+        </mc:Fallback>
+      </mc:AlternateContent>
+      <p:cxnSp>
+        <p:nvCxnSpPr>
+          <p:cNvPr id="12" name="Straight Arrow Connector 11">
+            <a:extLst>
+              <a:ext uri="{FF2B5EF4-FFF2-40B4-BE49-F238E27FC236}">
+                <a16:creationId xmlns:a16="http://schemas.microsoft.com/office/drawing/2014/main" id="{6D5DD8A2-4371-BF22-61DF-1EFC3A713A1B}"/>
+              </a:ext>
+            </a:extLst>
+          </p:cNvPr>
+          <p:cNvCxnSpPr>
+            <a:cxnSpLocks/>
+          </p:cNvCxnSpPr>
+          <p:nvPr/>
+        </p:nvCxnSpPr>
+        <p:spPr>
+          <a:xfrm flipH="1" flipV="1">
+            <a:off x="8216266" y="2901353"/>
+            <a:ext cx="1422794" cy="477547"/>
+          </a:xfrm>
+          <a:prstGeom prst="straightConnector1">
+            <a:avLst/>
+          </a:prstGeom>
+          <a:ln w="28575">
+            <a:solidFill>
+              <a:schemeClr val="tx1"/>
+            </a:solidFill>
+            <a:tailEnd type="triangle"/>
+          </a:ln>
+        </p:spPr>
+        <p:style>
+          <a:lnRef idx="1">
+            <a:schemeClr val="accent1"/>
+          </a:lnRef>
+          <a:fillRef idx="0">
+            <a:schemeClr val="accent1"/>
+          </a:fillRef>
+          <a:effectRef idx="0">
+            <a:schemeClr val="accent1"/>
+          </a:effectRef>
+          <a:fontRef idx="minor">
+            <a:schemeClr val="tx1"/>
+          </a:fontRef>
+        </p:style>
+      </p:cxnSp>
+      <mc:AlternateContent xmlns:mc="http://schemas.openxmlformats.org/markup-compatibility/2006" xmlns:a14="http://schemas.microsoft.com/office/drawing/2010/main">
+        <mc:Choice Requires="a14">
+          <p:sp>
+            <p:nvSpPr>
+              <p:cNvPr id="14" name="TextBox 13">
+                <a:extLst>
+                  <a:ext uri="{FF2B5EF4-FFF2-40B4-BE49-F238E27FC236}">
+                    <a16:creationId xmlns:a16="http://schemas.microsoft.com/office/drawing/2014/main" id="{E32E439A-1375-01F0-E0AA-2AED1989B405}"/>
+                  </a:ext>
+                </a:extLst>
+              </p:cNvPr>
+              <p:cNvSpPr txBox="1"/>
+              <p:nvPr/>
+            </p:nvSpPr>
+            <p:spPr>
+              <a:xfrm>
+                <a:off x="9764714" y="3140126"/>
+                <a:ext cx="509627" cy="449803"/>
+              </a:xfrm>
+              <a:prstGeom prst="rect">
+                <a:avLst/>
+              </a:prstGeom>
+              <a:noFill/>
+            </p:spPr>
+            <p:txBody>
+              <a:bodyPr wrap="none" lIns="0" tIns="0" rIns="0" bIns="0" rtlCol="0">
+                <a:spAutoFit/>
+              </a:bodyPr>
+              <a:lstStyle/>
+              <a:p>
+                <a:pPr/>
+                <a14:m>
+                  <m:oMathPara xmlns:m="http://schemas.openxmlformats.org/officeDocument/2006/math">
+                    <m:oMathParaPr>
+                      <m:jc m:val="centerGroup"/>
+                    </m:oMathParaPr>
+                    <m:oMath xmlns:m="http://schemas.openxmlformats.org/officeDocument/2006/math">
+                      <m:sSub>
+                        <m:sSubPr>
+                          <m:ctrlPr>
+                            <a:rPr lang="pt-BR" sz="2800" b="0" i="1" smtClean="0">
+                              <a:latin typeface="Cambria Math" panose="02040503050406030204" pitchFamily="18" charset="0"/>
+                            </a:rPr>
+                          </m:ctrlPr>
+                        </m:sSubPr>
+                        <m:e>
+                          <m:r>
+                            <a:rPr lang="pt-BR" sz="2800" b="0" i="1" smtClean="0">
+                              <a:latin typeface="Cambria Math" panose="02040503050406030204" pitchFamily="18" charset="0"/>
+                            </a:rPr>
+                            <m:t>𝑐</m:t>
+                          </m:r>
+                        </m:e>
+                        <m:sub>
+                          <m:r>
+                            <a:rPr lang="pt-BR" sz="2800" b="0" i="1" smtClean="0">
+                              <a:latin typeface="Cambria Math" panose="02040503050406030204" pitchFamily="18" charset="0"/>
+                            </a:rPr>
+                            <m:t>𝑖</m:t>
+                          </m:r>
+                          <m:r>
+                            <a:rPr lang="pt-BR" sz="2800" b="0" i="1" smtClean="0">
+                              <a:latin typeface="Cambria Math" panose="02040503050406030204" pitchFamily="18" charset="0"/>
+                            </a:rPr>
+                            <m:t>,</m:t>
+                          </m:r>
+                          <m:r>
+                            <a:rPr lang="pt-BR" sz="2800" b="0" i="1" smtClean="0">
+                              <a:latin typeface="Cambria Math" panose="02040503050406030204" pitchFamily="18" charset="0"/>
+                            </a:rPr>
+                            <m:t>𝑙</m:t>
+                          </m:r>
+                        </m:sub>
+                      </m:sSub>
+                    </m:oMath>
+                  </m:oMathPara>
+                </a14:m>
+                <a:endParaRPr lang="en-BR" sz="2800" dirty="0"/>
+              </a:p>
+            </p:txBody>
+          </p:sp>
+        </mc:Choice>
+        <mc:Fallback xmlns="">
+          <p:sp>
+            <p:nvSpPr>
+              <p:cNvPr id="14" name="TextBox 13">
+                <a:extLst>
+                  <a:ext uri="{FF2B5EF4-FFF2-40B4-BE49-F238E27FC236}">
+                    <a16:creationId xmlns:a16="http://schemas.microsoft.com/office/drawing/2014/main" id="{E32E439A-1375-01F0-E0AA-2AED1989B405}"/>
+                  </a:ext>
+                </a:extLst>
+              </p:cNvPr>
+              <p:cNvSpPr txBox="1">
+                <a:spLocks noRot="1" noChangeAspect="1" noMove="1" noResize="1" noEditPoints="1" noAdjustHandles="1" noChangeArrowheads="1" noChangeShapeType="1" noTextEdit="1"/>
+              </p:cNvSpPr>
+              <p:nvPr/>
+            </p:nvSpPr>
+            <p:spPr>
+              <a:xfrm>
+                <a:off x="9764714" y="3140126"/>
+                <a:ext cx="509627" cy="449803"/>
+              </a:xfrm>
+              <a:prstGeom prst="rect">
+                <a:avLst/>
+              </a:prstGeom>
+              <a:blipFill>
+                <a:blip r:embed="rId7"/>
+                <a:stretch>
+                  <a:fillRect l="-7317" r="-4878" b="-13889"/>
+                </a:stretch>
+              </a:blipFill>
+            </p:spPr>
+            <p:txBody>
+              <a:bodyPr/>
+              <a:lstStyle/>
+              <a:p>
+                <a:r>
+                  <a:rPr lang="en-BR">
+                    <a:noFill/>
+                  </a:rPr>
+                  <a:t> </a:t>
+                </a:r>
+              </a:p>
+            </p:txBody>
+          </p:sp>
+        </mc:Fallback>
+      </mc:AlternateContent>
+      <p:cxnSp>
+        <p:nvCxnSpPr>
+          <p:cNvPr id="2" name="Straight Arrow Connector 1">
+            <a:extLst>
+              <a:ext uri="{FF2B5EF4-FFF2-40B4-BE49-F238E27FC236}">
+                <a16:creationId xmlns:a16="http://schemas.microsoft.com/office/drawing/2014/main" id="{314C0598-8BE1-F55C-E3AC-4BA38896E252}"/>
+              </a:ext>
+            </a:extLst>
+          </p:cNvPr>
+          <p:cNvCxnSpPr>
+            <a:cxnSpLocks/>
+          </p:cNvCxnSpPr>
+          <p:nvPr/>
+        </p:nvCxnSpPr>
+        <p:spPr>
+          <a:xfrm flipH="1" flipV="1">
+            <a:off x="8281190" y="2233368"/>
+            <a:ext cx="1422794" cy="477547"/>
+          </a:xfrm>
+          <a:prstGeom prst="straightConnector1">
+            <a:avLst/>
+          </a:prstGeom>
+          <a:ln w="28575">
+            <a:solidFill>
+              <a:schemeClr val="tx1"/>
+            </a:solidFill>
+            <a:tailEnd type="triangle"/>
+          </a:ln>
+        </p:spPr>
+        <p:style>
+          <a:lnRef idx="1">
+            <a:schemeClr val="accent1"/>
+          </a:lnRef>
+          <a:fillRef idx="0">
+            <a:schemeClr val="accent1"/>
+          </a:fillRef>
+          <a:effectRef idx="0">
+            <a:schemeClr val="accent1"/>
+          </a:effectRef>
+          <a:fontRef idx="minor">
+            <a:schemeClr val="tx1"/>
+          </a:fontRef>
+        </p:style>
+      </p:cxnSp>
+      <mc:AlternateContent xmlns:mc="http://schemas.openxmlformats.org/markup-compatibility/2006" xmlns:a14="http://schemas.microsoft.com/office/drawing/2010/main">
+        <mc:Choice Requires="a14">
+          <p:sp>
+            <p:nvSpPr>
+              <p:cNvPr id="4" name="TextBox 3">
+                <a:extLst>
+                  <a:ext uri="{FF2B5EF4-FFF2-40B4-BE49-F238E27FC236}">
+                    <a16:creationId xmlns:a16="http://schemas.microsoft.com/office/drawing/2014/main" id="{A9FB6294-DA9C-C786-1A2D-0A499516E113}"/>
+                  </a:ext>
+                </a:extLst>
+              </p:cNvPr>
+              <p:cNvSpPr txBox="1"/>
+              <p:nvPr/>
+            </p:nvSpPr>
+            <p:spPr>
+              <a:xfrm>
+                <a:off x="9865905" y="2458788"/>
+                <a:ext cx="849207" cy="449803"/>
+              </a:xfrm>
+              <a:prstGeom prst="rect">
+                <a:avLst/>
+              </a:prstGeom>
+              <a:noFill/>
+            </p:spPr>
+            <p:txBody>
+              <a:bodyPr wrap="none" lIns="0" tIns="0" rIns="0" bIns="0" rtlCol="0">
+                <a:spAutoFit/>
+              </a:bodyPr>
+              <a:lstStyle/>
+              <a:p>
+                <a:pPr/>
+                <a14:m>
+                  <m:oMathPara xmlns:m="http://schemas.openxmlformats.org/officeDocument/2006/math">
+                    <m:oMathParaPr>
+                      <m:jc m:val="centerGroup"/>
+                    </m:oMathParaPr>
+                    <m:oMath xmlns:m="http://schemas.openxmlformats.org/officeDocument/2006/math">
+                      <m:sSub>
+                        <m:sSubPr>
+                          <m:ctrlPr>
+                            <a:rPr lang="pt-BR" sz="2800" b="0" i="1" smtClean="0">
+                              <a:latin typeface="Cambria Math" panose="02040503050406030204" pitchFamily="18" charset="0"/>
+                            </a:rPr>
+                          </m:ctrlPr>
+                        </m:sSubPr>
+                        <m:e>
+                          <m:r>
+                            <a:rPr lang="pt-BR" sz="2800" b="0" i="1" smtClean="0">
+                              <a:latin typeface="Cambria Math" panose="02040503050406030204" pitchFamily="18" charset="0"/>
+                            </a:rPr>
+                            <m:t>𝑐</m:t>
+                          </m:r>
+                        </m:e>
+                        <m:sub>
+                          <m:r>
+                            <a:rPr lang="pt-BR" sz="2800" b="0" i="1" smtClean="0">
+                              <a:latin typeface="Cambria Math" panose="02040503050406030204" pitchFamily="18" charset="0"/>
+                            </a:rPr>
+                            <m:t>h𝑜𝑡</m:t>
+                          </m:r>
+                          <m:r>
+                            <a:rPr lang="pt-BR" sz="2800" b="0" i="1" smtClean="0">
+                              <a:latin typeface="Cambria Math" panose="02040503050406030204" pitchFamily="18" charset="0"/>
+                            </a:rPr>
+                            <m:t>,</m:t>
+                          </m:r>
+                          <m:r>
+                            <a:rPr lang="pt-BR" sz="2800" b="0" i="1" smtClean="0">
+                              <a:latin typeface="Cambria Math" panose="02040503050406030204" pitchFamily="18" charset="0"/>
+                            </a:rPr>
+                            <m:t>𝑙</m:t>
+                          </m:r>
+                        </m:sub>
+                      </m:sSub>
+                    </m:oMath>
+                  </m:oMathPara>
+                </a14:m>
+                <a:endParaRPr lang="en-BR" sz="2800" dirty="0"/>
+              </a:p>
+            </p:txBody>
+          </p:sp>
+        </mc:Choice>
+        <mc:Fallback xmlns="">
+          <p:sp>
+            <p:nvSpPr>
+              <p:cNvPr id="4" name="TextBox 3">
+                <a:extLst>
+                  <a:ext uri="{FF2B5EF4-FFF2-40B4-BE49-F238E27FC236}">
+                    <a16:creationId xmlns:a16="http://schemas.microsoft.com/office/drawing/2014/main" id="{A9FB6294-DA9C-C786-1A2D-0A499516E113}"/>
+                  </a:ext>
+                </a:extLst>
+              </p:cNvPr>
+              <p:cNvSpPr txBox="1">
+                <a:spLocks noRot="1" noChangeAspect="1" noMove="1" noResize="1" noEditPoints="1" noAdjustHandles="1" noChangeArrowheads="1" noChangeShapeType="1" noTextEdit="1"/>
+              </p:cNvSpPr>
+              <p:nvPr/>
+            </p:nvSpPr>
+            <p:spPr>
+              <a:xfrm>
+                <a:off x="9865905" y="2458788"/>
+                <a:ext cx="849207" cy="449803"/>
+              </a:xfrm>
+              <a:prstGeom prst="rect">
+                <a:avLst/>
+              </a:prstGeom>
+              <a:blipFill>
+                <a:blip r:embed="rId8"/>
+                <a:stretch>
+                  <a:fillRect l="-4412" r="-1471" b="-13889"/>
+                </a:stretch>
+              </a:blipFill>
+            </p:spPr>
+            <p:txBody>
+              <a:bodyPr/>
+              <a:lstStyle/>
+              <a:p>
+                <a:r>
+                  <a:rPr lang="en-BR">
+                    <a:noFill/>
+                  </a:rPr>
+                  <a:t> </a:t>
+                </a:r>
+              </a:p>
+            </p:txBody>
+          </p:sp>
+        </mc:Fallback>
+      </mc:AlternateContent>
     </p:spTree>
     <p:extLst>
       <p:ext uri="{BB962C8B-B14F-4D97-AF65-F5344CB8AC3E}">
